--- a/dist/초4/과학/자석과상태변화/초4_과학_자석과상태변화_01_자석의성질.pptx
+++ b/dist/초4/과학/자석과상태변화/초4_과학_자석과상태변화_01_자석의성질.pptx
@@ -123,13 +123,13 @@
   <p:extLst>
     <p:ext uri="{521415D9-36F7-43E2-AB2F-B90AF26B5E84}">
       <p14:sectionLst xmlns:p14="http://schemas.microsoft.com/office/powerpoint/2010/main">
-        <p14:section name="도입" id="{8877b9ff-ccbe-df40-cda5-ac22f8d8efb7}">
+        <p14:section name="도입" id="{0c9599c7-4e3b-bad5-5b15-313e2d35c1c5}">
           <p14:sldIdLst>
             <p14:sldId id="256"/>
             <p14:sldId id="257"/>
           </p14:sldIdLst>
         </p14:section>
-        <p14:section name="연습" id="{e52e319a-7185-b40b-68e6-85b802f28799}">
+        <p14:section name="연습" id="{613b34d4-0a22-1f1a-e8fd-8c6db239261b}">
           <p14:sldIdLst>
             <p14:sldId id="258"/>
             <p14:sldId id="259"/>
@@ -141,34 +141,34 @@
             <p14:sldId id="267"/>
           </p14:sldIdLst>
         </p14:section>
-        <p14:section name="개념" id="{b34e2aaa-11c9-f9b2-221f-221935aec90f}">
+        <p14:section name="개념" id="{84fe5974-1bc4-a602-f16a-95cbb6246f51}">
           <p14:sldIdLst>
             <p14:sldId id="261"/>
             <p14:sldId id="266"/>
           </p14:sldIdLst>
         </p14:section>
-        <p14:section name="연습" id="{a42c8e74-61a7-6249-5e23-9d1eeb9a1592}">
+        <p14:section name="연습" id="{63234813-6372-9c83-6815-535951a4ba2d}">
           <p14:sldIdLst/>
         </p14:section>
-        <p14:section name="개념" id="{64a43280-7403-229b-b912-06cae39e101b}">
+        <p14:section name="개념" id="{20c069db-cdea-0ea4-1b66-2b114650b567}">
           <p14:sldIdLst/>
         </p14:section>
-        <p14:section name="연습" id="{1e390e9d-ce19-b4a9-71bb-3054cc750b20}">
+        <p14:section name="연습" id="{28d33051-cccf-d2c4-ee2d-97d85260c046}">
           <p14:sldIdLst/>
         </p14:section>
-        <p14:section name="확인" id="{18931951-66dd-b527-444d-6b57d381ed77}">
+        <p14:section name="확인" id="{7fc4137e-10f1-a943-5d49-4df784f14d0d}">
           <p14:sldIdLst>
             <p14:sldId id="268"/>
             <p14:sldId id="269"/>
             <p14:sldId id="270"/>
           </p14:sldIdLst>
         </p14:section>
-        <p14:section name="정리" id="{6e6de279-e824-512e-e8b8-a4301375dbbf}">
+        <p14:section name="정리" id="{f1b3adf4-534a-ea06-8233-36bdb4fb4d4c}">
           <p14:sldIdLst>
             <p14:sldId id="271"/>
           </p14:sldIdLst>
         </p14:section>
-        <p14:section name="보충" id="{03ca4d72-07a5-3c5d-dc37-c677e6041b63}">
+        <p14:section name="보충" id="{aa0b8298-b39b-4afd-8cc0-d0e7b9804cb1}">
           <p14:sldIdLst>
             <p14:sldId id="272"/>
           </p14:sldIdLst>
